--- a/en/slides/16-Computer_Architecture-Permanent_Memory-Lab.pptx
+++ b/en/slides/16-Computer_Architecture-Permanent_Memory-Lab.pptx
@@ -119,18 +119,18 @@
   <p:extLst>
     <p:ext uri="{521415D9-36F7-43E2-AB2F-B90AF26B5E84}">
       <p14:sectionLst xmlns:p14="http://schemas.microsoft.com/office/powerpoint/2010/main">
-        <p14:section name="Opening" id="{6b698e99-74c0-77f3-cd5a-5f88ddf7e7bc}">
+        <p14:section name="Opening" id="{27f70689-ef04-68f2-93a0-3341dad8e2a8}">
           <p14:sldIdLst>
             <p14:sldId id="256"/>
             <p14:sldId id="257"/>
           </p14:sldIdLst>
         </p14:section>
-        <p14:section name="Warm-up on the machine" id="{c0c47837-d9f2-6c66-48aa-e37d062c9527}">
+        <p14:section name="Warm-up on the machine" id="{5bdb88ed-c535-ce21-b2c1-89644da1d8c9}">
           <p14:sldIdLst>
             <p14:sldId id="258"/>
           </p14:sldIdLst>
         </p14:section>
-        <p14:section name="The complete program" id="{27014663-20e6-0c63-2f63-f691c6c3fb57}">
+        <p14:section name="The complete program" id="{ea6ac786-5a20-f04e-de31-85e37df0ab90}">
           <p14:sldIdLst>
             <p14:sldId id="259"/>
             <p14:sldId id="260"/>
@@ -138,7 +138,7 @@
             <p14:sldId id="262"/>
           </p14:sldIdLst>
         </p14:section>
-        <p14:section name="Run it and test it" id="{383b64b4-d7ca-5134-fa0f-1c4934a986d0}">
+        <p14:section name="Run it and test it" id="{a95db52a-e31d-4bce-c12c-3716de5f3ef1}">
           <p14:sldIdLst>
             <p14:sldId id="263"/>
             <p14:sldId id="264"/>
@@ -147,7 +147,7 @@
             <p14:sldId id="267"/>
           </p14:sldIdLst>
         </p14:section>
-        <p14:section name="Exercises" id="{bbb65cb1-0224-354c-59fe-6de58ff94e25}">
+        <p14:section name="Exercises" id="{665b0ffd-1754-292b-f975-c1b8e52210d6}">
           <p14:sldIdLst>
             <p14:sldId id="268"/>
           </p14:sldIdLst>

--- a/en/slides/16-Computer_Architecture-Permanent_Memory-Lab.pptx
+++ b/en/slides/16-Computer_Architecture-Permanent_Memory-Lab.pptx
@@ -119,18 +119,18 @@
   <p:extLst>
     <p:ext uri="{521415D9-36F7-43E2-AB2F-B90AF26B5E84}">
       <p14:sectionLst xmlns:p14="http://schemas.microsoft.com/office/powerpoint/2010/main">
-        <p14:section name="Opening" id="{27f70689-ef04-68f2-93a0-3341dad8e2a8}">
+        <p14:section name="Opening" id="{db372517-4988-e2fd-ebbe-53c5443a8e4c}">
           <p14:sldIdLst>
             <p14:sldId id="256"/>
             <p14:sldId id="257"/>
           </p14:sldIdLst>
         </p14:section>
-        <p14:section name="Warm-up on the machine" id="{5bdb88ed-c535-ce21-b2c1-89644da1d8c9}">
+        <p14:section name="Warm-up on the machine" id="{285837a7-1f5a-c2c0-e813-e524494ed41c}">
           <p14:sldIdLst>
             <p14:sldId id="258"/>
           </p14:sldIdLst>
         </p14:section>
-        <p14:section name="The complete program" id="{ea6ac786-5a20-f04e-de31-85e37df0ab90}">
+        <p14:section name="The complete program" id="{c31afa35-062f-bc40-e9e0-49548667ee39}">
           <p14:sldIdLst>
             <p14:sldId id="259"/>
             <p14:sldId id="260"/>
@@ -138,7 +138,7 @@
             <p14:sldId id="262"/>
           </p14:sldIdLst>
         </p14:section>
-        <p14:section name="Run it and test it" id="{a95db52a-e31d-4bce-c12c-3716de5f3ef1}">
+        <p14:section name="Run it and test it" id="{1630ccb9-b79b-1f34-650c-54f371ec113f}">
           <p14:sldIdLst>
             <p14:sldId id="263"/>
             <p14:sldId id="264"/>
@@ -147,7 +147,7 @@
             <p14:sldId id="267"/>
           </p14:sldIdLst>
         </p14:section>
-        <p14:section name="Exercises" id="{665b0ffd-1754-292b-f975-c1b8e52210d6}">
+        <p14:section name="Exercises" id="{9b87b425-eefb-93ef-be79-1ca76590a18c}">
           <p14:sldIdLst>
             <p14:sldId id="268"/>
           </p14:sldIdLst>
@@ -558,7 +558,8 @@
               <a:rPr lang="en-US" dirty="0"/>
               <a:t>This is the code deck of Lecture 16. Where the lecture deck develops the concepts, this deck contains everything that is written and executed: each listing with its commentary, the complete program of the lecture, the output it is expected to produce, and the procedure for testing it on each of the three hosts. The two decks are meant to be read together: the concepts explain the code, and the code gives the concepts an observable consequence.
 Learning status: UNDERSTAND NOW, by the end of this lecture you explain it, trace it and apply it on your own; USE NOW, you follow and use the recipe today; how it works inside is explained later, or is not part of the course; UNDERSTAND LATER, recognise the name and what it is for; a later lecture explains it. A slide without a badge is context: a story, an example, a question, an exercise.
-Learning status of this lecture. UNDERSTAND NOW: ROM, flash, firmware; the von Neumann architecture; the cache; secondary memory. USE NOW: the complete program, the PRG32 tools (used, not studied, in this course). UNDERSTAND LATER: nothing. A slide without a badge is context: a story, an example, a question, an exercise.</a:t>
+Learning status of this lecture. UNDERSTAND NOW: ROM, flash, firmware; the von Neumann architecture; the cache; secondary memory. USE NOW: the complete program, the PRG32 tools (used, not studied, in this course). UNDERSTAND LATER: nothing. A slide without a badge is context: a story, an example, a question, an exercise.
+Roadmap. Today's outcomes: (1) classify permanent memories and say where the cartridge is kept; (2) explain a cache hit and a cache miss, and locality; (3) compare the access times of disks and solid-state storage. Builds on: the von Neumann architecture (Lecture 03). Next: Lecture 17, Verm1, Part 3: A Body, Rules and States.</a:t>
             </a:r>
             <a:endParaRPr lang="en-US" dirty="0"/>
           </a:p>
